--- a/mon/sinh_hoc/slide/lop10/Slide_SINH10_Bai1_GioiThieuKhaiQuatMonSinhHoc_T1-2.pptx
+++ b/mon/sinh_hoc/slide/lop10/Slide_SINH10_Bai1_GioiThieuKhaiQuatMonSinhHoc_T1-2.pptx
@@ -4791,7 +4791,7 @@
                 </a:solidFill>
                 <a:latin typeface="Calibri"/>
               </a:rPr>
-              <a:t>Trường THPT Vĩnh Thạnh – Tổ Sử – Địa – Sinh</a:t>
+              <a:t>Trường THPT – Tổ Sử – Địa – Sinh</a:t>
             </a:r>
           </a:p>
         </p:txBody>
@@ -9580,103 +9580,6 @@
       <p:grpSpPr/>
       <p:sp>
         <p:nvSpPr>
-          <p:cNvPr id="2" name="Rectangle 1"/>
-          <p:cNvSpPr/>
-          <p:nvPr/>
-        </p:nvSpPr>
-        <p:spPr>
-          <a:xfrm>
-            <a:off x="457200" y="384048"/>
-            <a:ext cx="109728" cy="658368"/>
-          </a:xfrm>
-          <a:prstGeom prst="rect">
-            <a:avLst/>
-          </a:prstGeom>
-          <a:solidFill>
-            <a:srgbClr val="1E40AF"/>
-          </a:solidFill>
-          <a:ln>
-            <a:noFill/>
-          </a:ln>
-          <a:effectLst/>
-        </p:spPr>
-        <p:style>
-          <a:lnRef idx="1">
-            <a:schemeClr val="accent1"/>
-          </a:lnRef>
-          <a:fillRef idx="3">
-            <a:schemeClr val="accent1"/>
-          </a:fillRef>
-          <a:effectRef idx="2">
-            <a:schemeClr val="accent1"/>
-          </a:effectRef>
-          <a:fontRef idx="minor">
-            <a:schemeClr val="lt1"/>
-          </a:fontRef>
-        </p:style>
-        <p:txBody>
-          <a:bodyPr rtlCol="0" anchor="ctr"/>
-          <a:lstStyle/>
-          <a:p>
-            <a:pPr algn="ctr"/>
-          </a:p>
-        </p:txBody>
-      </p:sp>
-      <p:sp>
-        <p:nvSpPr>
-          <p:cNvPr id="3" name="Rounded Rectangle 2"/>
-          <p:cNvSpPr/>
-          <p:nvPr/>
-        </p:nvSpPr>
-        <p:spPr>
-          <a:xfrm>
-            <a:off x="10097719" y="457200"/>
-            <a:ext cx="1545336" cy="457200"/>
-          </a:xfrm>
-          <a:prstGeom prst="roundRect">
-            <a:avLst/>
-          </a:prstGeom>
-          <a:solidFill>
-            <a:srgbClr val="166534"/>
-          </a:solidFill>
-          <a:ln>
-            <a:noFill/>
-          </a:ln>
-          <a:effectLst/>
-        </p:spPr>
-        <p:style>
-          <a:lnRef idx="1">
-            <a:schemeClr val="accent1"/>
-          </a:lnRef>
-          <a:fillRef idx="3">
-            <a:schemeClr val="accent1"/>
-          </a:fillRef>
-          <a:effectRef idx="2">
-            <a:schemeClr val="accent1"/>
-          </a:effectRef>
-          <a:fontRef idx="minor">
-            <a:schemeClr val="lt1"/>
-          </a:fontRef>
-        </p:style>
-        <p:txBody>
-          <a:bodyPr rtlCol="0" anchor="ctr" wrap="none" tIns="0" bIns="0"/>
-          <a:lstStyle/>
-          <a:p>
-            <a:pPr algn="ctr"/>
-            <a:r>
-              <a:rPr sz="1400" b="1">
-                <a:solidFill>
-                  <a:srgbClr val="FFFFFF"/>
-                </a:solidFill>
-                <a:latin typeface="Arial"/>
-              </a:rPr>
-              <a:t>CỦNG CỐ</a:t>
-            </a:r>
-          </a:p>
-        </p:txBody>
-      </p:sp>
-      <p:sp>
-        <p:nvSpPr>
           <p:cNvPr id="4" name="TextBox 3"/>
           <p:cNvSpPr txBox="1"/>
           <p:nvPr/>
@@ -9788,30 +9691,2085 @@
           </a:p>
         </p:txBody>
       </p:sp>
-      <p:pic>
-        <p:nvPicPr>
-          <p:cNvPr id="7" name="Picture 6" descr="SoDoTuDuy_SINH10_Bai1_GioiThieuKhaiQuatMonSinhHoc_T1-2.png"/>
-          <p:cNvPicPr>
-            <a:picLocks noChangeAspect="1"/>
-          </p:cNvPicPr>
-          <p:nvPr/>
-        </p:nvPicPr>
-        <p:blipFill>
-          <a:blip r:embed="rId2"/>
-          <a:stretch>
-            <a:fillRect/>
-          </a:stretch>
-        </p:blipFill>
-        <p:spPr>
-          <a:xfrm>
-            <a:off x="1788855" y="1371600"/>
-            <a:ext cx="8675250" cy="4846320"/>
-          </a:xfrm>
-          <a:prstGeom prst="rect">
-            <a:avLst/>
-          </a:prstGeom>
-        </p:spPr>
-      </p:pic>
+      <p:cxnSp>
+        <p:nvCxnSpPr>
+          <p:cNvPr id="7" name="Connector 6"/>
+          <p:cNvCxnSpPr/>
+          <p:nvPr/>
+        </p:nvCxnSpPr>
+        <p:spPr>
+          <a:xfrm flipH="1" flipV="1">
+            <a:off x="4338888" y="2670962"/>
+            <a:ext cx="1688379" cy="1283818"/>
+          </a:xfrm>
+          <a:prstGeom prst="line">
+            <a:avLst/>
+          </a:prstGeom>
+          <a:ln w="44450">
+            <a:solidFill>
+              <a:srgbClr val="548235"/>
+            </a:solidFill>
+          </a:ln>
+        </p:spPr>
+        <p:style>
+          <a:lnRef idx="2">
+            <a:schemeClr val="accent1"/>
+          </a:lnRef>
+          <a:fillRef idx="0">
+            <a:schemeClr val="accent1"/>
+          </a:fillRef>
+          <a:effectRef idx="1">
+            <a:schemeClr val="accent1"/>
+          </a:effectRef>
+          <a:fontRef idx="minor">
+            <a:schemeClr val="tx1"/>
+          </a:fontRef>
+        </p:style>
+      </p:cxnSp>
+      <p:cxnSp>
+        <p:nvCxnSpPr>
+          <p:cNvPr id="8" name="Connector 7"/>
+          <p:cNvCxnSpPr/>
+          <p:nvPr/>
+        </p:nvCxnSpPr>
+        <p:spPr>
+          <a:xfrm flipH="1" flipV="1">
+            <a:off x="2596375" y="1628983"/>
+            <a:ext cx="1742513" cy="1041979"/>
+          </a:xfrm>
+          <a:prstGeom prst="line">
+            <a:avLst/>
+          </a:prstGeom>
+          <a:ln w="15875">
+            <a:solidFill>
+              <a:srgbClr val="548235"/>
+            </a:solidFill>
+          </a:ln>
+        </p:spPr>
+        <p:style>
+          <a:lnRef idx="2">
+            <a:schemeClr val="accent1"/>
+          </a:lnRef>
+          <a:fillRef idx="0">
+            <a:schemeClr val="accent1"/>
+          </a:fillRef>
+          <a:effectRef idx="1">
+            <a:schemeClr val="accent1"/>
+          </a:effectRef>
+          <a:fontRef idx="minor">
+            <a:schemeClr val="tx1"/>
+          </a:fontRef>
+        </p:style>
+      </p:cxnSp>
+      <p:sp>
+        <p:nvSpPr>
+          <p:cNvPr id="9" name="Rounded Rectangle 8"/>
+          <p:cNvSpPr/>
+          <p:nvPr/>
+        </p:nvSpPr>
+        <p:spPr>
+          <a:xfrm>
+            <a:off x="1016266" y="1352671"/>
+            <a:ext cx="1580109" cy="552622"/>
+          </a:xfrm>
+          <a:prstGeom prst="roundRect">
+            <a:avLst>
+              <a:gd name="adj" fmla="val 50000"/>
+            </a:avLst>
+          </a:prstGeom>
+          <a:solidFill>
+            <a:srgbClr val="EDF5E8"/>
+          </a:solidFill>
+          <a:ln w="15875">
+            <a:solidFill>
+              <a:srgbClr val="548235"/>
+            </a:solidFill>
+          </a:ln>
+          <a:effectLst/>
+        </p:spPr>
+        <p:style>
+          <a:lnRef idx="1">
+            <a:schemeClr val="accent1"/>
+          </a:lnRef>
+          <a:fillRef idx="3">
+            <a:schemeClr val="accent1"/>
+          </a:fillRef>
+          <a:effectRef idx="2">
+            <a:schemeClr val="accent1"/>
+          </a:effectRef>
+          <a:fontRef idx="minor">
+            <a:schemeClr val="lt1"/>
+          </a:fontRef>
+        </p:style>
+        <p:txBody>
+          <a:bodyPr rtlCol="0" anchor="ctr" wrap="none" lIns="64000" rIns="64000" tIns="25400" bIns="25400"/>
+          <a:lstStyle/>
+          <a:p>
+            <a:pPr algn="ctr"/>
+            <a:r>
+              <a:rPr sz="1300" b="1">
+                <a:solidFill>
+                  <a:srgbClr val="8B0000"/>
+                </a:solidFill>
+                <a:latin typeface="Calibri"/>
+              </a:rPr>
+              <a:t>Khoa học về sự</a:t>
+            </a:r>
+          </a:p>
+          <a:p>
+            <a:pPr algn="ctr"/>
+            <a:r>
+              <a:rPr sz="1300" b="1">
+                <a:solidFill>
+                  <a:srgbClr val="8B0000"/>
+                </a:solidFill>
+                <a:latin typeface="Calibri"/>
+              </a:rPr>
+              <a:t>sống</a:t>
+            </a:r>
+          </a:p>
+        </p:txBody>
+      </p:sp>
+      <p:cxnSp>
+        <p:nvCxnSpPr>
+          <p:cNvPr id="10" name="Connector 9"/>
+          <p:cNvCxnSpPr/>
+          <p:nvPr/>
+        </p:nvCxnSpPr>
+        <p:spPr>
+          <a:xfrm flipH="1" flipV="1">
+            <a:off x="2807703" y="2256495"/>
+            <a:ext cx="1531185" cy="414467"/>
+          </a:xfrm>
+          <a:prstGeom prst="line">
+            <a:avLst/>
+          </a:prstGeom>
+          <a:ln w="15875">
+            <a:solidFill>
+              <a:srgbClr val="548235"/>
+            </a:solidFill>
+          </a:ln>
+        </p:spPr>
+        <p:style>
+          <a:lnRef idx="2">
+            <a:schemeClr val="accent1"/>
+          </a:lnRef>
+          <a:fillRef idx="0">
+            <a:schemeClr val="accent1"/>
+          </a:fillRef>
+          <a:effectRef idx="1">
+            <a:schemeClr val="accent1"/>
+          </a:effectRef>
+          <a:fontRef idx="minor">
+            <a:schemeClr val="tx1"/>
+          </a:fontRef>
+        </p:style>
+      </p:cxnSp>
+      <p:sp>
+        <p:nvSpPr>
+          <p:cNvPr id="11" name="Rounded Rectangle 10"/>
+          <p:cNvSpPr/>
+          <p:nvPr/>
+        </p:nvSpPr>
+        <p:spPr>
+          <a:xfrm>
+            <a:off x="804938" y="1980184"/>
+            <a:ext cx="2002765" cy="552622"/>
+          </a:xfrm>
+          <a:prstGeom prst="roundRect">
+            <a:avLst>
+              <a:gd name="adj" fmla="val 50000"/>
+            </a:avLst>
+          </a:prstGeom>
+          <a:solidFill>
+            <a:srgbClr val="EDF5E8"/>
+          </a:solidFill>
+          <a:ln w="15875">
+            <a:solidFill>
+              <a:srgbClr val="548235"/>
+            </a:solidFill>
+          </a:ln>
+          <a:effectLst/>
+        </p:spPr>
+        <p:style>
+          <a:lnRef idx="1">
+            <a:schemeClr val="accent1"/>
+          </a:lnRef>
+          <a:fillRef idx="3">
+            <a:schemeClr val="accent1"/>
+          </a:fillRef>
+          <a:effectRef idx="2">
+            <a:schemeClr val="accent1"/>
+          </a:effectRef>
+          <a:fontRef idx="minor">
+            <a:schemeClr val="lt1"/>
+          </a:fontRef>
+        </p:style>
+        <p:txBody>
+          <a:bodyPr rtlCol="0" anchor="ctr" wrap="none" lIns="64000" rIns="64000" tIns="25400" bIns="25400"/>
+          <a:lstStyle/>
+          <a:p>
+            <a:pPr algn="ctr"/>
+            <a:r>
+              <a:rPr sz="1300" b="0">
+                <a:solidFill>
+                  <a:srgbClr val="000000"/>
+                </a:solidFill>
+                <a:latin typeface="Calibri"/>
+              </a:rPr>
+              <a:t>Đối tượng: sinh vật,</a:t>
+            </a:r>
+          </a:p>
+          <a:p>
+            <a:pPr algn="ctr"/>
+            <a:r>
+              <a:rPr sz="1300" b="0">
+                <a:solidFill>
+                  <a:srgbClr val="000000"/>
+                </a:solidFill>
+                <a:latin typeface="Calibri"/>
+              </a:rPr>
+              <a:t>cấp độ tổ chức</a:t>
+            </a:r>
+          </a:p>
+        </p:txBody>
+      </p:sp>
+      <p:cxnSp>
+        <p:nvCxnSpPr>
+          <p:cNvPr id="12" name="Connector 11"/>
+          <p:cNvCxnSpPr/>
+          <p:nvPr/>
+        </p:nvCxnSpPr>
+        <p:spPr>
+          <a:xfrm flipH="1">
+            <a:off x="2678925" y="2670962"/>
+            <a:ext cx="1659963" cy="213045"/>
+          </a:xfrm>
+          <a:prstGeom prst="line">
+            <a:avLst/>
+          </a:prstGeom>
+          <a:ln w="15875">
+            <a:solidFill>
+              <a:srgbClr val="548235"/>
+            </a:solidFill>
+          </a:ln>
+        </p:spPr>
+        <p:style>
+          <a:lnRef idx="2">
+            <a:schemeClr val="accent1"/>
+          </a:lnRef>
+          <a:fillRef idx="0">
+            <a:schemeClr val="accent1"/>
+          </a:fillRef>
+          <a:effectRef idx="1">
+            <a:schemeClr val="accent1"/>
+          </a:effectRef>
+          <a:fontRef idx="minor">
+            <a:schemeClr val="tx1"/>
+          </a:fontRef>
+        </p:style>
+      </p:cxnSp>
+      <p:sp>
+        <p:nvSpPr>
+          <p:cNvPr id="13" name="Rounded Rectangle 12"/>
+          <p:cNvSpPr/>
+          <p:nvPr/>
+        </p:nvSpPr>
+        <p:spPr>
+          <a:xfrm>
+            <a:off x="933716" y="2607696"/>
+            <a:ext cx="1745209" cy="552622"/>
+          </a:xfrm>
+          <a:prstGeom prst="roundRect">
+            <a:avLst>
+              <a:gd name="adj" fmla="val 50000"/>
+            </a:avLst>
+          </a:prstGeom>
+          <a:solidFill>
+            <a:srgbClr val="EDF5E8"/>
+          </a:solidFill>
+          <a:ln w="15875">
+            <a:solidFill>
+              <a:srgbClr val="548235"/>
+            </a:solidFill>
+          </a:ln>
+          <a:effectLst/>
+        </p:spPr>
+        <p:style>
+          <a:lnRef idx="1">
+            <a:schemeClr val="accent1"/>
+          </a:lnRef>
+          <a:fillRef idx="3">
+            <a:schemeClr val="accent1"/>
+          </a:fillRef>
+          <a:effectRef idx="2">
+            <a:schemeClr val="accent1"/>
+          </a:effectRef>
+          <a:fontRef idx="minor">
+            <a:schemeClr val="lt1"/>
+          </a:fontRef>
+        </p:style>
+        <p:txBody>
+          <a:bodyPr rtlCol="0" anchor="ctr" wrap="none" lIns="64000" rIns="64000" tIns="25400" bIns="25400"/>
+          <a:lstStyle/>
+          <a:p>
+            <a:pPr algn="ctr"/>
+            <a:r>
+              <a:rPr sz="1300" b="0">
+                <a:solidFill>
+                  <a:srgbClr val="000000"/>
+                </a:solidFill>
+                <a:latin typeface="Calibri"/>
+              </a:rPr>
+              <a:t>Nghiên cứu cơ bản</a:t>
+            </a:r>
+          </a:p>
+          <a:p>
+            <a:pPr algn="ctr"/>
+            <a:r>
+              <a:rPr sz="1300" b="0">
+                <a:solidFill>
+                  <a:srgbClr val="000000"/>
+                </a:solidFill>
+                <a:latin typeface="Calibri"/>
+              </a:rPr>
+              <a:t>– ứng dụng</a:t>
+            </a:r>
+          </a:p>
+        </p:txBody>
+      </p:sp>
+      <p:cxnSp>
+        <p:nvCxnSpPr>
+          <p:cNvPr id="14" name="Connector 13"/>
+          <p:cNvCxnSpPr/>
+          <p:nvPr/>
+        </p:nvCxnSpPr>
+        <p:spPr>
+          <a:xfrm flipH="1">
+            <a:off x="2507221" y="2670962"/>
+            <a:ext cx="1831667" cy="941268"/>
+          </a:xfrm>
+          <a:prstGeom prst="line">
+            <a:avLst/>
+          </a:prstGeom>
+          <a:ln w="15875">
+            <a:solidFill>
+              <a:srgbClr val="548235"/>
+            </a:solidFill>
+          </a:ln>
+        </p:spPr>
+        <p:style>
+          <a:lnRef idx="2">
+            <a:schemeClr val="accent1"/>
+          </a:lnRef>
+          <a:fillRef idx="0">
+            <a:schemeClr val="accent1"/>
+          </a:fillRef>
+          <a:effectRef idx="1">
+            <a:schemeClr val="accent1"/>
+          </a:effectRef>
+          <a:fontRef idx="minor">
+            <a:schemeClr val="tx1"/>
+          </a:fontRef>
+        </p:style>
+      </p:cxnSp>
+      <p:sp>
+        <p:nvSpPr>
+          <p:cNvPr id="15" name="Rounded Rectangle 14"/>
+          <p:cNvSpPr/>
+          <p:nvPr/>
+        </p:nvSpPr>
+        <p:spPr>
+          <a:xfrm>
+            <a:off x="1105420" y="3235208"/>
+            <a:ext cx="1401801" cy="754044"/>
+          </a:xfrm>
+          <a:prstGeom prst="roundRect">
+            <a:avLst>
+              <a:gd name="adj" fmla="val 50000"/>
+            </a:avLst>
+          </a:prstGeom>
+          <a:solidFill>
+            <a:srgbClr val="EDF5E8"/>
+          </a:solidFill>
+          <a:ln w="15875">
+            <a:solidFill>
+              <a:srgbClr val="548235"/>
+            </a:solidFill>
+          </a:ln>
+          <a:effectLst/>
+        </p:spPr>
+        <p:style>
+          <a:lnRef idx="1">
+            <a:schemeClr val="accent1"/>
+          </a:lnRef>
+          <a:fillRef idx="3">
+            <a:schemeClr val="accent1"/>
+          </a:fillRef>
+          <a:effectRef idx="2">
+            <a:schemeClr val="accent1"/>
+          </a:effectRef>
+          <a:fontRef idx="minor">
+            <a:schemeClr val="lt1"/>
+          </a:fontRef>
+        </p:style>
+        <p:txBody>
+          <a:bodyPr rtlCol="0" anchor="ctr" wrap="none" lIns="64000" rIns="64000" tIns="25400" bIns="25400"/>
+          <a:lstStyle/>
+          <a:p>
+            <a:pPr algn="ctr"/>
+            <a:r>
+              <a:rPr sz="1300" b="0">
+                <a:solidFill>
+                  <a:srgbClr val="000000"/>
+                </a:solidFill>
+                <a:latin typeface="Calibri"/>
+              </a:rPr>
+              <a:t>10: tế bào ·</a:t>
+            </a:r>
+          </a:p>
+          <a:p>
+            <a:pPr algn="ctr"/>
+            <a:r>
+              <a:rPr sz="1300" b="0">
+                <a:solidFill>
+                  <a:srgbClr val="000000"/>
+                </a:solidFill>
+                <a:latin typeface="Calibri"/>
+              </a:rPr>
+              <a:t>11: cơ thể ·</a:t>
+            </a:r>
+          </a:p>
+          <a:p>
+            <a:pPr algn="ctr"/>
+            <a:r>
+              <a:rPr sz="1300" b="0">
+                <a:solidFill>
+                  <a:srgbClr val="000000"/>
+                </a:solidFill>
+                <a:latin typeface="Calibri"/>
+              </a:rPr>
+              <a:t>12: di truyền</a:t>
+            </a:r>
+          </a:p>
+        </p:txBody>
+      </p:sp>
+      <p:sp>
+        <p:nvSpPr>
+          <p:cNvPr id="16" name="Oval 15"/>
+          <p:cNvSpPr/>
+          <p:nvPr/>
+        </p:nvSpPr>
+        <p:spPr>
+          <a:xfrm>
+            <a:off x="3502606" y="2259078"/>
+            <a:ext cx="1672565" cy="823767"/>
+          </a:xfrm>
+          <a:prstGeom prst="ellipse">
+            <a:avLst/>
+          </a:prstGeom>
+          <a:solidFill>
+            <a:srgbClr val="E2EFDA"/>
+          </a:solidFill>
+          <a:ln w="31750">
+            <a:solidFill>
+              <a:srgbClr val="375623"/>
+            </a:solidFill>
+          </a:ln>
+          <a:effectLst/>
+        </p:spPr>
+        <p:style>
+          <a:lnRef idx="1">
+            <a:schemeClr val="accent1"/>
+          </a:lnRef>
+          <a:fillRef idx="3">
+            <a:schemeClr val="accent1"/>
+          </a:fillRef>
+          <a:effectRef idx="2">
+            <a:schemeClr val="accent1"/>
+          </a:effectRef>
+          <a:fontRef idx="minor">
+            <a:schemeClr val="lt1"/>
+          </a:fontRef>
+        </p:style>
+        <p:txBody>
+          <a:bodyPr rtlCol="0" anchor="ctr" wrap="none" lIns="64000" rIns="64000" tIns="25400" bIns="25400"/>
+          <a:lstStyle/>
+          <a:p>
+            <a:pPr algn="ctr"/>
+            <a:r>
+              <a:rPr sz="1500" b="1">
+                <a:solidFill>
+                  <a:srgbClr val="000000"/>
+                </a:solidFill>
+                <a:latin typeface="Calibri"/>
+              </a:rPr>
+              <a:t>① Sinh học</a:t>
+            </a:r>
+          </a:p>
+          <a:p>
+            <a:pPr algn="ctr"/>
+            <a:r>
+              <a:rPr sz="1500" b="1">
+                <a:solidFill>
+                  <a:srgbClr val="000000"/>
+                </a:solidFill>
+                <a:latin typeface="Calibri"/>
+              </a:rPr>
+              <a:t>là gì?</a:t>
+            </a:r>
+          </a:p>
+        </p:txBody>
+      </p:sp>
+      <p:cxnSp>
+        <p:nvCxnSpPr>
+          <p:cNvPr id="17" name="Connector 16"/>
+          <p:cNvCxnSpPr/>
+          <p:nvPr/>
+        </p:nvCxnSpPr>
+        <p:spPr>
+          <a:xfrm flipV="1">
+            <a:off x="6027267" y="2670962"/>
+            <a:ext cx="1688379" cy="1283818"/>
+          </a:xfrm>
+          <a:prstGeom prst="line">
+            <a:avLst/>
+          </a:prstGeom>
+          <a:ln w="44450">
+            <a:solidFill>
+              <a:srgbClr val="BF8F00"/>
+            </a:solidFill>
+          </a:ln>
+        </p:spPr>
+        <p:style>
+          <a:lnRef idx="2">
+            <a:schemeClr val="accent1"/>
+          </a:lnRef>
+          <a:fillRef idx="0">
+            <a:schemeClr val="accent1"/>
+          </a:fillRef>
+          <a:effectRef idx="1">
+            <a:schemeClr val="accent1"/>
+          </a:effectRef>
+          <a:fontRef idx="minor">
+            <a:schemeClr val="tx1"/>
+          </a:fontRef>
+        </p:style>
+      </p:cxnSp>
+      <p:cxnSp>
+        <p:nvCxnSpPr>
+          <p:cNvPr id="18" name="Connector 17"/>
+          <p:cNvCxnSpPr/>
+          <p:nvPr/>
+        </p:nvCxnSpPr>
+        <p:spPr>
+          <a:xfrm flipV="1">
+            <a:off x="7715646" y="2031827"/>
+            <a:ext cx="1574111" cy="639135"/>
+          </a:xfrm>
+          <a:prstGeom prst="line">
+            <a:avLst/>
+          </a:prstGeom>
+          <a:ln w="15875">
+            <a:solidFill>
+              <a:srgbClr val="BF8F00"/>
+            </a:solidFill>
+          </a:ln>
+        </p:spPr>
+        <p:style>
+          <a:lnRef idx="2">
+            <a:schemeClr val="accent1"/>
+          </a:lnRef>
+          <a:fillRef idx="0">
+            <a:schemeClr val="accent1"/>
+          </a:fillRef>
+          <a:effectRef idx="1">
+            <a:schemeClr val="accent1"/>
+          </a:effectRef>
+          <a:fontRef idx="minor">
+            <a:schemeClr val="tx1"/>
+          </a:fontRef>
+        </p:style>
+      </p:cxnSp>
+      <p:sp>
+        <p:nvSpPr>
+          <p:cNvPr id="19" name="Rounded Rectangle 18"/>
+          <p:cNvSpPr/>
+          <p:nvPr/>
+        </p:nvSpPr>
+        <p:spPr>
+          <a:xfrm>
+            <a:off x="9289757" y="1755515"/>
+            <a:ext cx="1916913" cy="552622"/>
+          </a:xfrm>
+          <a:prstGeom prst="roundRect">
+            <a:avLst>
+              <a:gd name="adj" fmla="val 50000"/>
+            </a:avLst>
+          </a:prstGeom>
+          <a:solidFill>
+            <a:srgbClr val="FFF8E1"/>
+          </a:solidFill>
+          <a:ln w="15875">
+            <a:solidFill>
+              <a:srgbClr val="BF8F00"/>
+            </a:solidFill>
+          </a:ln>
+          <a:effectLst/>
+        </p:spPr>
+        <p:style>
+          <a:lnRef idx="1">
+            <a:schemeClr val="accent1"/>
+          </a:lnRef>
+          <a:fillRef idx="3">
+            <a:schemeClr val="accent1"/>
+          </a:fillRef>
+          <a:effectRef idx="2">
+            <a:schemeClr val="accent1"/>
+          </a:effectRef>
+          <a:fontRef idx="minor">
+            <a:schemeClr val="lt1"/>
+          </a:fontRef>
+        </p:style>
+        <p:txBody>
+          <a:bodyPr rtlCol="0" anchor="ctr" wrap="none" lIns="64000" rIns="64000" tIns="25400" bIns="25400"/>
+          <a:lstStyle/>
+          <a:p>
+            <a:pPr algn="ctr"/>
+            <a:r>
+              <a:rPr sz="1300" b="0">
+                <a:solidFill>
+                  <a:srgbClr val="000000"/>
+                </a:solidFill>
+                <a:latin typeface="Calibri"/>
+              </a:rPr>
+              <a:t>Giảm bệnh tật, tăng</a:t>
+            </a:r>
+          </a:p>
+          <a:p>
+            <a:pPr algn="ctr"/>
+            <a:r>
+              <a:rPr sz="1300" b="0">
+                <a:solidFill>
+                  <a:srgbClr val="000000"/>
+                </a:solidFill>
+                <a:latin typeface="Calibri"/>
+              </a:rPr>
+              <a:t>tuổi thọ</a:t>
+            </a:r>
+          </a:p>
+        </p:txBody>
+      </p:sp>
+      <p:cxnSp>
+        <p:nvCxnSpPr>
+          <p:cNvPr id="20" name="Connector 19"/>
+          <p:cNvCxnSpPr/>
+          <p:nvPr/>
+        </p:nvCxnSpPr>
+        <p:spPr>
+          <a:xfrm flipV="1">
+            <a:off x="7715646" y="2558628"/>
+            <a:ext cx="1603829" cy="112334"/>
+          </a:xfrm>
+          <a:prstGeom prst="line">
+            <a:avLst/>
+          </a:prstGeom>
+          <a:ln w="15875">
+            <a:solidFill>
+              <a:srgbClr val="BF8F00"/>
+            </a:solidFill>
+          </a:ln>
+        </p:spPr>
+        <p:style>
+          <a:lnRef idx="2">
+            <a:schemeClr val="accent1"/>
+          </a:lnRef>
+          <a:fillRef idx="0">
+            <a:schemeClr val="accent1"/>
+          </a:fillRef>
+          <a:effectRef idx="1">
+            <a:schemeClr val="accent1"/>
+          </a:effectRef>
+          <a:fontRef idx="minor">
+            <a:schemeClr val="tx1"/>
+          </a:fontRef>
+        </p:style>
+      </p:cxnSp>
+      <p:sp>
+        <p:nvSpPr>
+          <p:cNvPr id="21" name="Rounded Rectangle 20"/>
+          <p:cNvSpPr/>
+          <p:nvPr/>
+        </p:nvSpPr>
+        <p:spPr>
+          <a:xfrm>
+            <a:off x="9319475" y="2383028"/>
+            <a:ext cx="1857477" cy="351200"/>
+          </a:xfrm>
+          <a:prstGeom prst="roundRect">
+            <a:avLst>
+              <a:gd name="adj" fmla="val 50000"/>
+            </a:avLst>
+          </a:prstGeom>
+          <a:solidFill>
+            <a:srgbClr val="FFF8E1"/>
+          </a:solidFill>
+          <a:ln w="15875">
+            <a:solidFill>
+              <a:srgbClr val="BF8F00"/>
+            </a:solidFill>
+          </a:ln>
+          <a:effectLst/>
+        </p:spPr>
+        <p:style>
+          <a:lnRef idx="1">
+            <a:schemeClr val="accent1"/>
+          </a:lnRef>
+          <a:fillRef idx="3">
+            <a:schemeClr val="accent1"/>
+          </a:fillRef>
+          <a:effectRef idx="2">
+            <a:schemeClr val="accent1"/>
+          </a:effectRef>
+          <a:fontRef idx="minor">
+            <a:schemeClr val="lt1"/>
+          </a:fontRef>
+        </p:style>
+        <p:txBody>
+          <a:bodyPr rtlCol="0" anchor="ctr" wrap="none" lIns="64000" rIns="64000" tIns="25400" bIns="25400"/>
+          <a:lstStyle/>
+          <a:p>
+            <a:pPr algn="ctr"/>
+            <a:r>
+              <a:rPr sz="1300" b="1">
+                <a:solidFill>
+                  <a:srgbClr val="8B0000"/>
+                </a:solidFill>
+                <a:latin typeface="Calibri"/>
+              </a:rPr>
+              <a:t>Sinh học hệ thống</a:t>
+            </a:r>
+          </a:p>
+        </p:txBody>
+      </p:sp>
+      <p:cxnSp>
+        <p:nvCxnSpPr>
+          <p:cNvPr id="22" name="Connector 21"/>
+          <p:cNvCxnSpPr/>
+          <p:nvPr/>
+        </p:nvCxnSpPr>
+        <p:spPr>
+          <a:xfrm>
+            <a:off x="7715646" y="2670962"/>
+            <a:ext cx="1702889" cy="313756"/>
+          </a:xfrm>
+          <a:prstGeom prst="line">
+            <a:avLst/>
+          </a:prstGeom>
+          <a:ln w="15875">
+            <a:solidFill>
+              <a:srgbClr val="BF8F00"/>
+            </a:solidFill>
+          </a:ln>
+        </p:spPr>
+        <p:style>
+          <a:lnRef idx="2">
+            <a:schemeClr val="accent1"/>
+          </a:lnRef>
+          <a:fillRef idx="0">
+            <a:schemeClr val="accent1"/>
+          </a:fillRef>
+          <a:effectRef idx="1">
+            <a:schemeClr val="accent1"/>
+          </a:effectRef>
+          <a:fontRef idx="minor">
+            <a:schemeClr val="tx1"/>
+          </a:fontRef>
+        </p:style>
+      </p:cxnSp>
+      <p:sp>
+        <p:nvSpPr>
+          <p:cNvPr id="23" name="Rounded Rectangle 22"/>
+          <p:cNvSpPr/>
+          <p:nvPr/>
+        </p:nvSpPr>
+        <p:spPr>
+          <a:xfrm>
+            <a:off x="9418535" y="2809118"/>
+            <a:ext cx="1659357" cy="351200"/>
+          </a:xfrm>
+          <a:prstGeom prst="roundRect">
+            <a:avLst>
+              <a:gd name="adj" fmla="val 50000"/>
+            </a:avLst>
+          </a:prstGeom>
+          <a:solidFill>
+            <a:srgbClr val="FFF8E1"/>
+          </a:solidFill>
+          <a:ln w="15875">
+            <a:solidFill>
+              <a:srgbClr val="BF8F00"/>
+            </a:solidFill>
+          </a:ln>
+          <a:effectLst/>
+        </p:spPr>
+        <p:style>
+          <a:lnRef idx="1">
+            <a:schemeClr val="accent1"/>
+          </a:lnRef>
+          <a:fillRef idx="3">
+            <a:schemeClr val="accent1"/>
+          </a:fillRef>
+          <a:effectRef idx="2">
+            <a:schemeClr val="accent1"/>
+          </a:effectRef>
+          <a:fontRef idx="minor">
+            <a:schemeClr val="lt1"/>
+          </a:fontRef>
+        </p:style>
+        <p:txBody>
+          <a:bodyPr rtlCol="0" anchor="ctr" wrap="none" lIns="64000" rIns="64000" tIns="25400" bIns="25400"/>
+          <a:lstStyle/>
+          <a:p>
+            <a:pPr algn="ctr"/>
+            <a:r>
+              <a:rPr sz="1300" b="0">
+                <a:solidFill>
+                  <a:srgbClr val="000000"/>
+                </a:solidFill>
+                <a:latin typeface="Calibri"/>
+              </a:rPr>
+              <a:t>Thuốc hướng đích</a:t>
+            </a:r>
+          </a:p>
+        </p:txBody>
+      </p:sp>
+      <p:cxnSp>
+        <p:nvCxnSpPr>
+          <p:cNvPr id="24" name="Connector 23"/>
+          <p:cNvCxnSpPr/>
+          <p:nvPr/>
+        </p:nvCxnSpPr>
+        <p:spPr>
+          <a:xfrm>
+            <a:off x="7715646" y="2670962"/>
+            <a:ext cx="1874593" cy="739846"/>
+          </a:xfrm>
+          <a:prstGeom prst="line">
+            <a:avLst/>
+          </a:prstGeom>
+          <a:ln w="15875">
+            <a:solidFill>
+              <a:srgbClr val="BF8F00"/>
+            </a:solidFill>
+          </a:ln>
+        </p:spPr>
+        <p:style>
+          <a:lnRef idx="2">
+            <a:schemeClr val="accent1"/>
+          </a:lnRef>
+          <a:fillRef idx="0">
+            <a:schemeClr val="accent1"/>
+          </a:fillRef>
+          <a:effectRef idx="1">
+            <a:schemeClr val="accent1"/>
+          </a:effectRef>
+          <a:fontRef idx="minor">
+            <a:schemeClr val="tx1"/>
+          </a:fontRef>
+        </p:style>
+      </p:cxnSp>
+      <p:sp>
+        <p:nvSpPr>
+          <p:cNvPr id="25" name="Rounded Rectangle 24"/>
+          <p:cNvSpPr/>
+          <p:nvPr/>
+        </p:nvSpPr>
+        <p:spPr>
+          <a:xfrm>
+            <a:off x="9590239" y="3235208"/>
+            <a:ext cx="1315949" cy="351200"/>
+          </a:xfrm>
+          <a:prstGeom prst="roundRect">
+            <a:avLst>
+              <a:gd name="adj" fmla="val 50000"/>
+            </a:avLst>
+          </a:prstGeom>
+          <a:solidFill>
+            <a:srgbClr val="FFF8E1"/>
+          </a:solidFill>
+          <a:ln w="15875">
+            <a:solidFill>
+              <a:srgbClr val="BF8F00"/>
+            </a:solidFill>
+          </a:ln>
+          <a:effectLst/>
+        </p:spPr>
+        <p:style>
+          <a:lnRef idx="1">
+            <a:schemeClr val="accent1"/>
+          </a:lnRef>
+          <a:fillRef idx="3">
+            <a:schemeClr val="accent1"/>
+          </a:fillRef>
+          <a:effectRef idx="2">
+            <a:schemeClr val="accent1"/>
+          </a:effectRef>
+          <a:fontRef idx="minor">
+            <a:schemeClr val="lt1"/>
+          </a:fontRef>
+        </p:style>
+        <p:txBody>
+          <a:bodyPr rtlCol="0" anchor="ctr" wrap="none" lIns="64000" rIns="64000" tIns="25400" bIns="25400"/>
+          <a:lstStyle/>
+          <a:p>
+            <a:pPr algn="ctr"/>
+            <a:r>
+              <a:rPr sz="1300" b="0">
+                <a:solidFill>
+                  <a:srgbClr val="000000"/>
+                </a:solidFill>
+                <a:latin typeface="Calibri"/>
+              </a:rPr>
+              <a:t>Vaccine mRNA</a:t>
+            </a:r>
+          </a:p>
+        </p:txBody>
+      </p:sp>
+      <p:sp>
+        <p:nvSpPr>
+          <p:cNvPr id="26" name="Oval 25"/>
+          <p:cNvSpPr/>
+          <p:nvPr/>
+        </p:nvSpPr>
+        <p:spPr>
+          <a:xfrm>
+            <a:off x="6810021" y="2259078"/>
+            <a:ext cx="1811249" cy="823767"/>
+          </a:xfrm>
+          <a:prstGeom prst="ellipse">
+            <a:avLst/>
+          </a:prstGeom>
+          <a:solidFill>
+            <a:srgbClr val="FFF2CC"/>
+          </a:solidFill>
+          <a:ln w="31750">
+            <a:solidFill>
+              <a:srgbClr val="BF8F00"/>
+            </a:solidFill>
+          </a:ln>
+          <a:effectLst/>
+        </p:spPr>
+        <p:style>
+          <a:lnRef idx="1">
+            <a:schemeClr val="accent1"/>
+          </a:lnRef>
+          <a:fillRef idx="3">
+            <a:schemeClr val="accent1"/>
+          </a:fillRef>
+          <a:effectRef idx="2">
+            <a:schemeClr val="accent1"/>
+          </a:effectRef>
+          <a:fontRef idx="minor">
+            <a:schemeClr val="lt1"/>
+          </a:fontRef>
+        </p:style>
+        <p:txBody>
+          <a:bodyPr rtlCol="0" anchor="ctr" wrap="none" lIns="64000" rIns="64000" tIns="25400" bIns="25400"/>
+          <a:lstStyle/>
+          <a:p>
+            <a:pPr algn="ctr"/>
+            <a:r>
+              <a:rPr sz="1500" b="1">
+                <a:solidFill>
+                  <a:srgbClr val="000000"/>
+                </a:solidFill>
+                <a:latin typeface="Calibri"/>
+              </a:rPr>
+              <a:t>② Vai trò</a:t>
+            </a:r>
+          </a:p>
+          <a:p>
+            <a:pPr algn="ctr"/>
+            <a:r>
+              <a:rPr sz="1500" b="1">
+                <a:solidFill>
+                  <a:srgbClr val="000000"/>
+                </a:solidFill>
+                <a:latin typeface="Calibri"/>
+              </a:rPr>
+              <a:t>&amp; tương lai</a:t>
+            </a:r>
+          </a:p>
+        </p:txBody>
+      </p:sp>
+      <p:cxnSp>
+        <p:nvCxnSpPr>
+          <p:cNvPr id="27" name="Connector 26"/>
+          <p:cNvCxnSpPr/>
+          <p:nvPr/>
+        </p:nvCxnSpPr>
+        <p:spPr>
+          <a:xfrm flipH="1">
+            <a:off x="4338888" y="3954780"/>
+            <a:ext cx="1688379" cy="1283817"/>
+          </a:xfrm>
+          <a:prstGeom prst="line">
+            <a:avLst/>
+          </a:prstGeom>
+          <a:ln w="44450">
+            <a:solidFill>
+              <a:srgbClr val="2F5597"/>
+            </a:solidFill>
+          </a:ln>
+        </p:spPr>
+        <p:style>
+          <a:lnRef idx="2">
+            <a:schemeClr val="accent1"/>
+          </a:lnRef>
+          <a:fillRef idx="0">
+            <a:schemeClr val="accent1"/>
+          </a:fillRef>
+          <a:effectRef idx="1">
+            <a:schemeClr val="accent1"/>
+          </a:effectRef>
+          <a:fontRef idx="minor">
+            <a:schemeClr val="tx1"/>
+          </a:fontRef>
+        </p:style>
+      </p:cxnSp>
+      <p:cxnSp>
+        <p:nvCxnSpPr>
+          <p:cNvPr id="28" name="Connector 27"/>
+          <p:cNvCxnSpPr/>
+          <p:nvPr/>
+        </p:nvCxnSpPr>
+        <p:spPr>
+          <a:xfrm flipH="1" flipV="1">
+            <a:off x="2464295" y="4398040"/>
+            <a:ext cx="1874593" cy="840557"/>
+          </a:xfrm>
+          <a:prstGeom prst="line">
+            <a:avLst/>
+          </a:prstGeom>
+          <a:ln w="15875">
+            <a:solidFill>
+              <a:srgbClr val="2F5597"/>
+            </a:solidFill>
+          </a:ln>
+        </p:spPr>
+        <p:style>
+          <a:lnRef idx="2">
+            <a:schemeClr val="accent1"/>
+          </a:lnRef>
+          <a:fillRef idx="0">
+            <a:schemeClr val="accent1"/>
+          </a:fillRef>
+          <a:effectRef idx="1">
+            <a:schemeClr val="accent1"/>
+          </a:effectRef>
+          <a:fontRef idx="minor">
+            <a:schemeClr val="tx1"/>
+          </a:fontRef>
+        </p:style>
+      </p:cxnSp>
+      <p:sp>
+        <p:nvSpPr>
+          <p:cNvPr id="29" name="Rounded Rectangle 28"/>
+          <p:cNvSpPr/>
+          <p:nvPr/>
+        </p:nvSpPr>
+        <p:spPr>
+          <a:xfrm>
+            <a:off x="1148346" y="4121729"/>
+            <a:ext cx="1315949" cy="552622"/>
+          </a:xfrm>
+          <a:prstGeom prst="roundRect">
+            <a:avLst>
+              <a:gd name="adj" fmla="val 50000"/>
+            </a:avLst>
+          </a:prstGeom>
+          <a:solidFill>
+            <a:srgbClr val="E3EEF9"/>
+          </a:solidFill>
+          <a:ln w="15875">
+            <a:solidFill>
+              <a:srgbClr val="2F5597"/>
+            </a:solidFill>
+          </a:ln>
+          <a:effectLst/>
+        </p:spPr>
+        <p:style>
+          <a:lnRef idx="1">
+            <a:schemeClr val="accent1"/>
+          </a:lnRef>
+          <a:fillRef idx="3">
+            <a:schemeClr val="accent1"/>
+          </a:fillRef>
+          <a:effectRef idx="2">
+            <a:schemeClr val="accent1"/>
+          </a:effectRef>
+          <a:fontRef idx="minor">
+            <a:schemeClr val="lt1"/>
+          </a:fontRef>
+        </p:style>
+        <p:txBody>
+          <a:bodyPr rtlCol="0" anchor="ctr" wrap="none" lIns="64000" rIns="64000" tIns="25400" bIns="25400"/>
+          <a:lstStyle/>
+          <a:p>
+            <a:pPr algn="ctr"/>
+            <a:r>
+              <a:rPr sz="1300" b="0">
+                <a:solidFill>
+                  <a:srgbClr val="000000"/>
+                </a:solidFill>
+                <a:latin typeface="Calibri"/>
+              </a:rPr>
+              <a:t>Y – dược ·</a:t>
+            </a:r>
+          </a:p>
+          <a:p>
+            <a:pPr algn="ctr"/>
+            <a:r>
+              <a:rPr sz="1300" b="0">
+                <a:solidFill>
+                  <a:srgbClr val="000000"/>
+                </a:solidFill>
+                <a:latin typeface="Calibri"/>
+              </a:rPr>
+              <a:t>Pháp y (DNA)</a:t>
+            </a:r>
+          </a:p>
+        </p:txBody>
+      </p:sp>
+      <p:cxnSp>
+        <p:nvCxnSpPr>
+          <p:cNvPr id="30" name="Connector 29"/>
+          <p:cNvCxnSpPr/>
+          <p:nvPr/>
+        </p:nvCxnSpPr>
+        <p:spPr>
+          <a:xfrm flipH="1" flipV="1">
+            <a:off x="2678925" y="5025552"/>
+            <a:ext cx="1659963" cy="213045"/>
+          </a:xfrm>
+          <a:prstGeom prst="line">
+            <a:avLst/>
+          </a:prstGeom>
+          <a:ln w="15875">
+            <a:solidFill>
+              <a:srgbClr val="2F5597"/>
+            </a:solidFill>
+          </a:ln>
+        </p:spPr>
+        <p:style>
+          <a:lnRef idx="2">
+            <a:schemeClr val="accent1"/>
+          </a:lnRef>
+          <a:fillRef idx="0">
+            <a:schemeClr val="accent1"/>
+          </a:fillRef>
+          <a:effectRef idx="1">
+            <a:schemeClr val="accent1"/>
+          </a:effectRef>
+          <a:fontRef idx="minor">
+            <a:schemeClr val="tx1"/>
+          </a:fontRef>
+        </p:style>
+      </p:cxnSp>
+      <p:sp>
+        <p:nvSpPr>
+          <p:cNvPr id="31" name="Rounded Rectangle 30"/>
+          <p:cNvSpPr/>
+          <p:nvPr/>
+        </p:nvSpPr>
+        <p:spPr>
+          <a:xfrm>
+            <a:off x="933716" y="4749241"/>
+            <a:ext cx="1745209" cy="552622"/>
+          </a:xfrm>
+          <a:prstGeom prst="roundRect">
+            <a:avLst>
+              <a:gd name="adj" fmla="val 50000"/>
+            </a:avLst>
+          </a:prstGeom>
+          <a:solidFill>
+            <a:srgbClr val="E3EEF9"/>
+          </a:solidFill>
+          <a:ln w="15875">
+            <a:solidFill>
+              <a:srgbClr val="2F5597"/>
+            </a:solidFill>
+          </a:ln>
+          <a:effectLst/>
+        </p:spPr>
+        <p:style>
+          <a:lnRef idx="1">
+            <a:schemeClr val="accent1"/>
+          </a:lnRef>
+          <a:fillRef idx="3">
+            <a:schemeClr val="accent1"/>
+          </a:fillRef>
+          <a:effectRef idx="2">
+            <a:schemeClr val="accent1"/>
+          </a:effectRef>
+          <a:fontRef idx="minor">
+            <a:schemeClr val="lt1"/>
+          </a:fontRef>
+        </p:style>
+        <p:txBody>
+          <a:bodyPr rtlCol="0" anchor="ctr" wrap="none" lIns="64000" rIns="64000" tIns="25400" bIns="25400"/>
+          <a:lstStyle/>
+          <a:p>
+            <a:pPr algn="ctr"/>
+            <a:r>
+              <a:rPr sz="1300" b="0">
+                <a:solidFill>
+                  <a:srgbClr val="000000"/>
+                </a:solidFill>
+                <a:latin typeface="Calibri"/>
+              </a:rPr>
+              <a:t>Nông – lâm –</a:t>
+            </a:r>
+          </a:p>
+          <a:p>
+            <a:pPr algn="ctr"/>
+            <a:r>
+              <a:rPr sz="1300" b="0">
+                <a:solidFill>
+                  <a:srgbClr val="000000"/>
+                </a:solidFill>
+                <a:latin typeface="Calibri"/>
+              </a:rPr>
+              <a:t>ngư (nuôi cấy mô)</a:t>
+            </a:r>
+          </a:p>
+        </p:txBody>
+      </p:sp>
+      <p:cxnSp>
+        <p:nvCxnSpPr>
+          <p:cNvPr id="32" name="Connector 31"/>
+          <p:cNvCxnSpPr/>
+          <p:nvPr/>
+        </p:nvCxnSpPr>
+        <p:spPr>
+          <a:xfrm flipH="1">
+            <a:off x="2764777" y="5238597"/>
+            <a:ext cx="1574111" cy="313756"/>
+          </a:xfrm>
+          <a:prstGeom prst="line">
+            <a:avLst/>
+          </a:prstGeom>
+          <a:ln w="15875">
+            <a:solidFill>
+              <a:srgbClr val="2F5597"/>
+            </a:solidFill>
+          </a:ln>
+        </p:spPr>
+        <p:style>
+          <a:lnRef idx="2">
+            <a:schemeClr val="accent1"/>
+          </a:lnRef>
+          <a:fillRef idx="0">
+            <a:schemeClr val="accent1"/>
+          </a:fillRef>
+          <a:effectRef idx="1">
+            <a:schemeClr val="accent1"/>
+          </a:effectRef>
+          <a:fontRef idx="minor">
+            <a:schemeClr val="tx1"/>
+          </a:fontRef>
+        </p:style>
+      </p:cxnSp>
+      <p:sp>
+        <p:nvSpPr>
+          <p:cNvPr id="33" name="Rounded Rectangle 32"/>
+          <p:cNvSpPr/>
+          <p:nvPr/>
+        </p:nvSpPr>
+        <p:spPr>
+          <a:xfrm>
+            <a:off x="847864" y="5376753"/>
+            <a:ext cx="1916913" cy="351200"/>
+          </a:xfrm>
+          <a:prstGeom prst="roundRect">
+            <a:avLst>
+              <a:gd name="adj" fmla="val 50000"/>
+            </a:avLst>
+          </a:prstGeom>
+          <a:solidFill>
+            <a:srgbClr val="E3EEF9"/>
+          </a:solidFill>
+          <a:ln w="15875">
+            <a:solidFill>
+              <a:srgbClr val="2F5597"/>
+            </a:solidFill>
+          </a:ln>
+          <a:effectLst/>
+        </p:spPr>
+        <p:style>
+          <a:lnRef idx="1">
+            <a:schemeClr val="accent1"/>
+          </a:lnRef>
+          <a:fillRef idx="3">
+            <a:schemeClr val="accent1"/>
+          </a:fillRef>
+          <a:effectRef idx="2">
+            <a:schemeClr val="accent1"/>
+          </a:effectRef>
+          <a:fontRef idx="minor">
+            <a:schemeClr val="lt1"/>
+          </a:fontRef>
+        </p:style>
+        <p:txBody>
+          <a:bodyPr rtlCol="0" anchor="ctr" wrap="none" lIns="64000" rIns="64000" tIns="25400" bIns="25400"/>
+          <a:lstStyle/>
+          <a:p>
+            <a:pPr algn="ctr"/>
+            <a:r>
+              <a:rPr sz="1300" b="0">
+                <a:solidFill>
+                  <a:srgbClr val="000000"/>
+                </a:solidFill>
+                <a:latin typeface="Calibri"/>
+              </a:rPr>
+              <a:t>Công nghệ thực phẩm</a:t>
+            </a:r>
+          </a:p>
+        </p:txBody>
+      </p:sp>
+      <p:cxnSp>
+        <p:nvCxnSpPr>
+          <p:cNvPr id="34" name="Connector 33"/>
+          <p:cNvCxnSpPr/>
+          <p:nvPr/>
+        </p:nvCxnSpPr>
+        <p:spPr>
+          <a:xfrm flipH="1">
+            <a:off x="2721851" y="5238597"/>
+            <a:ext cx="1617037" cy="840557"/>
+          </a:xfrm>
+          <a:prstGeom prst="line">
+            <a:avLst/>
+          </a:prstGeom>
+          <a:ln w="15875">
+            <a:solidFill>
+              <a:srgbClr val="2F5597"/>
+            </a:solidFill>
+          </a:ln>
+        </p:spPr>
+        <p:style>
+          <a:lnRef idx="2">
+            <a:schemeClr val="accent1"/>
+          </a:lnRef>
+          <a:fillRef idx="0">
+            <a:schemeClr val="accent1"/>
+          </a:fillRef>
+          <a:effectRef idx="1">
+            <a:schemeClr val="accent1"/>
+          </a:effectRef>
+          <a:fontRef idx="minor">
+            <a:schemeClr val="tx1"/>
+          </a:fontRef>
+        </p:style>
+      </p:cxnSp>
+      <p:sp>
+        <p:nvSpPr>
+          <p:cNvPr id="35" name="Rounded Rectangle 34"/>
+          <p:cNvSpPr/>
+          <p:nvPr/>
+        </p:nvSpPr>
+        <p:spPr>
+          <a:xfrm>
+            <a:off x="890790" y="5802843"/>
+            <a:ext cx="1831061" cy="552622"/>
+          </a:xfrm>
+          <a:prstGeom prst="roundRect">
+            <a:avLst>
+              <a:gd name="adj" fmla="val 50000"/>
+            </a:avLst>
+          </a:prstGeom>
+          <a:solidFill>
+            <a:srgbClr val="E3EEF9"/>
+          </a:solidFill>
+          <a:ln w="15875">
+            <a:solidFill>
+              <a:srgbClr val="2F5597"/>
+            </a:solidFill>
+          </a:ln>
+          <a:effectLst/>
+        </p:spPr>
+        <p:style>
+          <a:lnRef idx="1">
+            <a:schemeClr val="accent1"/>
+          </a:lnRef>
+          <a:fillRef idx="3">
+            <a:schemeClr val="accent1"/>
+          </a:fillRef>
+          <a:effectRef idx="2">
+            <a:schemeClr val="accent1"/>
+          </a:effectRef>
+          <a:fontRef idx="minor">
+            <a:schemeClr val="lt1"/>
+          </a:fontRef>
+        </p:style>
+        <p:txBody>
+          <a:bodyPr rtlCol="0" anchor="ctr" wrap="none" lIns="64000" rIns="64000" tIns="25400" bIns="25400"/>
+          <a:lstStyle/>
+          <a:p>
+            <a:pPr algn="ctr"/>
+            <a:r>
+              <a:rPr sz="1300" b="0">
+                <a:solidFill>
+                  <a:srgbClr val="000000"/>
+                </a:solidFill>
+                <a:latin typeface="Calibri"/>
+              </a:rPr>
+              <a:t>Môi trường · Phỏng</a:t>
+            </a:r>
+          </a:p>
+          <a:p>
+            <a:pPr algn="ctr"/>
+            <a:r>
+              <a:rPr sz="1300" b="0">
+                <a:solidFill>
+                  <a:srgbClr val="000000"/>
+                </a:solidFill>
+                <a:latin typeface="Calibri"/>
+              </a:rPr>
+              <a:t>sinh học</a:t>
+            </a:r>
+          </a:p>
+        </p:txBody>
+      </p:sp>
+      <p:sp>
+        <p:nvSpPr>
+          <p:cNvPr id="36" name="Oval 35"/>
+          <p:cNvSpPr/>
+          <p:nvPr/>
+        </p:nvSpPr>
+        <p:spPr>
+          <a:xfrm>
+            <a:off x="3363922" y="4995210"/>
+            <a:ext cx="1949933" cy="486773"/>
+          </a:xfrm>
+          <a:prstGeom prst="ellipse">
+            <a:avLst/>
+          </a:prstGeom>
+          <a:solidFill>
+            <a:srgbClr val="E2EFDA"/>
+          </a:solidFill>
+          <a:ln w="31750">
+            <a:solidFill>
+              <a:srgbClr val="375623"/>
+            </a:solidFill>
+          </a:ln>
+          <a:effectLst/>
+        </p:spPr>
+        <p:style>
+          <a:lnRef idx="1">
+            <a:schemeClr val="accent1"/>
+          </a:lnRef>
+          <a:fillRef idx="3">
+            <a:schemeClr val="accent1"/>
+          </a:fillRef>
+          <a:effectRef idx="2">
+            <a:schemeClr val="accent1"/>
+          </a:effectRef>
+          <a:fontRef idx="minor">
+            <a:schemeClr val="lt1"/>
+          </a:fontRef>
+        </p:style>
+        <p:txBody>
+          <a:bodyPr rtlCol="0" anchor="ctr" wrap="none" lIns="64000" rIns="64000" tIns="25400" bIns="25400"/>
+          <a:lstStyle/>
+          <a:p>
+            <a:pPr algn="ctr"/>
+            <a:r>
+              <a:rPr sz="1500" b="1">
+                <a:solidFill>
+                  <a:srgbClr val="000000"/>
+                </a:solidFill>
+                <a:latin typeface="Calibri"/>
+              </a:rPr>
+              <a:t>③ Ngành nghề</a:t>
+            </a:r>
+          </a:p>
+        </p:txBody>
+      </p:sp>
+      <p:cxnSp>
+        <p:nvCxnSpPr>
+          <p:cNvPr id="37" name="Connector 36"/>
+          <p:cNvCxnSpPr/>
+          <p:nvPr/>
+        </p:nvCxnSpPr>
+        <p:spPr>
+          <a:xfrm>
+            <a:off x="6027267" y="3954780"/>
+            <a:ext cx="1688379" cy="1283817"/>
+          </a:xfrm>
+          <a:prstGeom prst="line">
+            <a:avLst/>
+          </a:prstGeom>
+          <a:ln w="44450">
+            <a:solidFill>
+              <a:srgbClr val="7030A0"/>
+            </a:solidFill>
+          </a:ln>
+        </p:spPr>
+        <p:style>
+          <a:lnRef idx="2">
+            <a:schemeClr val="accent1"/>
+          </a:lnRef>
+          <a:fillRef idx="0">
+            <a:schemeClr val="accent1"/>
+          </a:fillRef>
+          <a:effectRef idx="1">
+            <a:schemeClr val="accent1"/>
+          </a:effectRef>
+          <a:fontRef idx="minor">
+            <a:schemeClr val="tx1"/>
+          </a:fontRef>
+        </p:style>
+      </p:cxnSp>
+      <p:cxnSp>
+        <p:nvCxnSpPr>
+          <p:cNvPr id="38" name="Connector 37"/>
+          <p:cNvCxnSpPr/>
+          <p:nvPr/>
+        </p:nvCxnSpPr>
+        <p:spPr>
+          <a:xfrm flipV="1">
+            <a:off x="7715646" y="4498751"/>
+            <a:ext cx="1511373" cy="739846"/>
+          </a:xfrm>
+          <a:prstGeom prst="line">
+            <a:avLst/>
+          </a:prstGeom>
+          <a:ln w="15875">
+            <a:solidFill>
+              <a:srgbClr val="7030A0"/>
+            </a:solidFill>
+          </a:ln>
+        </p:spPr>
+        <p:style>
+          <a:lnRef idx="2">
+            <a:schemeClr val="accent1"/>
+          </a:lnRef>
+          <a:fillRef idx="0">
+            <a:schemeClr val="accent1"/>
+          </a:fillRef>
+          <a:effectRef idx="1">
+            <a:schemeClr val="accent1"/>
+          </a:effectRef>
+          <a:fontRef idx="minor">
+            <a:schemeClr val="tx1"/>
+          </a:fontRef>
+        </p:style>
+      </p:cxnSp>
+      <p:sp>
+        <p:nvSpPr>
+          <p:cNvPr id="39" name="Rounded Rectangle 38"/>
+          <p:cNvSpPr/>
+          <p:nvPr/>
+        </p:nvSpPr>
+        <p:spPr>
+          <a:xfrm>
+            <a:off x="9227019" y="4222440"/>
+            <a:ext cx="2042389" cy="552622"/>
+          </a:xfrm>
+          <a:prstGeom prst="roundRect">
+            <a:avLst>
+              <a:gd name="adj" fmla="val 50000"/>
+            </a:avLst>
+          </a:prstGeom>
+          <a:solidFill>
+            <a:srgbClr val="F3E8F7"/>
+          </a:solidFill>
+          <a:ln w="15875">
+            <a:solidFill>
+              <a:srgbClr val="7030A0"/>
+            </a:solidFill>
+          </a:ln>
+          <a:effectLst/>
+        </p:spPr>
+        <p:style>
+          <a:lnRef idx="1">
+            <a:schemeClr val="accent1"/>
+          </a:lnRef>
+          <a:fillRef idx="3">
+            <a:schemeClr val="accent1"/>
+          </a:fillRef>
+          <a:effectRef idx="2">
+            <a:schemeClr val="accent1"/>
+          </a:effectRef>
+          <a:fontRef idx="minor">
+            <a:schemeClr val="lt1"/>
+          </a:fontRef>
+        </p:style>
+        <p:txBody>
+          <a:bodyPr rtlCol="0" anchor="ctr" wrap="none" lIns="64000" rIns="64000" tIns="25400" bIns="25400"/>
+          <a:lstStyle/>
+          <a:p>
+            <a:pPr algn="ctr"/>
+            <a:r>
+              <a:rPr sz="1300" b="1">
+                <a:solidFill>
+                  <a:srgbClr val="8B0000"/>
+                </a:solidFill>
+                <a:latin typeface="Calibri"/>
+              </a:rPr>
+              <a:t>Đáp ứng hiện tại,</a:t>
+            </a:r>
+          </a:p>
+          <a:p>
+            <a:pPr algn="ctr"/>
+            <a:r>
+              <a:rPr sz="1300" b="1">
+                <a:solidFill>
+                  <a:srgbClr val="8B0000"/>
+                </a:solidFill>
+                <a:latin typeface="Calibri"/>
+              </a:rPr>
+              <a:t>không hại tương lai</a:t>
+            </a:r>
+          </a:p>
+        </p:txBody>
+      </p:sp>
+      <p:cxnSp>
+        <p:nvCxnSpPr>
+          <p:cNvPr id="40" name="Connector 39"/>
+          <p:cNvCxnSpPr/>
+          <p:nvPr/>
+        </p:nvCxnSpPr>
+        <p:spPr>
+          <a:xfrm flipV="1">
+            <a:off x="7715646" y="5126263"/>
+            <a:ext cx="1788741" cy="112334"/>
+          </a:xfrm>
+          <a:prstGeom prst="line">
+            <a:avLst/>
+          </a:prstGeom>
+          <a:ln w="15875">
+            <a:solidFill>
+              <a:srgbClr val="7030A0"/>
+            </a:solidFill>
+          </a:ln>
+        </p:spPr>
+        <p:style>
+          <a:lnRef idx="2">
+            <a:schemeClr val="accent1"/>
+          </a:lnRef>
+          <a:fillRef idx="0">
+            <a:schemeClr val="accent1"/>
+          </a:fillRef>
+          <a:effectRef idx="1">
+            <a:schemeClr val="accent1"/>
+          </a:effectRef>
+          <a:fontRef idx="minor">
+            <a:schemeClr val="tx1"/>
+          </a:fontRef>
+        </p:style>
+      </p:cxnSp>
+      <p:sp>
+        <p:nvSpPr>
+          <p:cNvPr id="41" name="Rounded Rectangle 40"/>
+          <p:cNvSpPr/>
+          <p:nvPr/>
+        </p:nvSpPr>
+        <p:spPr>
+          <a:xfrm>
+            <a:off x="9504387" y="4849952"/>
+            <a:ext cx="1487653" cy="552622"/>
+          </a:xfrm>
+          <a:prstGeom prst="roundRect">
+            <a:avLst>
+              <a:gd name="adj" fmla="val 50000"/>
+            </a:avLst>
+          </a:prstGeom>
+          <a:solidFill>
+            <a:srgbClr val="F3E8F7"/>
+          </a:solidFill>
+          <a:ln w="15875">
+            <a:solidFill>
+              <a:srgbClr val="7030A0"/>
+            </a:solidFill>
+          </a:ln>
+          <a:effectLst/>
+        </p:spPr>
+        <p:style>
+          <a:lnRef idx="1">
+            <a:schemeClr val="accent1"/>
+          </a:lnRef>
+          <a:fillRef idx="3">
+            <a:schemeClr val="accent1"/>
+          </a:fillRef>
+          <a:effectRef idx="2">
+            <a:schemeClr val="accent1"/>
+          </a:effectRef>
+          <a:fontRef idx="minor">
+            <a:schemeClr val="lt1"/>
+          </a:fontRef>
+        </p:style>
+        <p:txBody>
+          <a:bodyPr rtlCol="0" anchor="ctr" wrap="none" lIns="64000" rIns="64000" tIns="25400" bIns="25400"/>
+          <a:lstStyle/>
+          <a:p>
+            <a:pPr algn="ctr"/>
+            <a:r>
+              <a:rPr sz="1300" b="0">
+                <a:solidFill>
+                  <a:srgbClr val="000000"/>
+                </a:solidFill>
+                <a:latin typeface="Calibri"/>
+              </a:rPr>
+              <a:t>Bảo vệ đa dạng</a:t>
+            </a:r>
+          </a:p>
+          <a:p>
+            <a:pPr algn="ctr"/>
+            <a:r>
+              <a:rPr sz="1300" b="0">
+                <a:solidFill>
+                  <a:srgbClr val="000000"/>
+                </a:solidFill>
+                <a:latin typeface="Calibri"/>
+              </a:rPr>
+              <a:t>sinh vật</a:t>
+            </a:r>
+          </a:p>
+        </p:txBody>
+      </p:sp>
+      <p:cxnSp>
+        <p:nvCxnSpPr>
+          <p:cNvPr id="42" name="Connector 41"/>
+          <p:cNvCxnSpPr/>
+          <p:nvPr/>
+        </p:nvCxnSpPr>
+        <p:spPr>
+          <a:xfrm>
+            <a:off x="7715646" y="5238597"/>
+            <a:ext cx="1702889" cy="414467"/>
+          </a:xfrm>
+          <a:prstGeom prst="line">
+            <a:avLst/>
+          </a:prstGeom>
+          <a:ln w="15875">
+            <a:solidFill>
+              <a:srgbClr val="7030A0"/>
+            </a:solidFill>
+          </a:ln>
+        </p:spPr>
+        <p:style>
+          <a:lnRef idx="2">
+            <a:schemeClr val="accent1"/>
+          </a:lnRef>
+          <a:fillRef idx="0">
+            <a:schemeClr val="accent1"/>
+          </a:fillRef>
+          <a:effectRef idx="1">
+            <a:schemeClr val="accent1"/>
+          </a:effectRef>
+          <a:fontRef idx="minor">
+            <a:schemeClr val="tx1"/>
+          </a:fontRef>
+        </p:style>
+      </p:cxnSp>
+      <p:sp>
+        <p:nvSpPr>
+          <p:cNvPr id="43" name="Rounded Rectangle 42"/>
+          <p:cNvSpPr/>
+          <p:nvPr/>
+        </p:nvSpPr>
+        <p:spPr>
+          <a:xfrm>
+            <a:off x="9418535" y="5477464"/>
+            <a:ext cx="1659357" cy="351200"/>
+          </a:xfrm>
+          <a:prstGeom prst="roundRect">
+            <a:avLst>
+              <a:gd name="adj" fmla="val 50000"/>
+            </a:avLst>
+          </a:prstGeom>
+          <a:solidFill>
+            <a:srgbClr val="F3E8F7"/>
+          </a:solidFill>
+          <a:ln w="15875">
+            <a:solidFill>
+              <a:srgbClr val="7030A0"/>
+            </a:solidFill>
+          </a:ln>
+          <a:effectLst/>
+        </p:spPr>
+        <p:style>
+          <a:lnRef idx="1">
+            <a:schemeClr val="accent1"/>
+          </a:lnRef>
+          <a:fillRef idx="3">
+            <a:schemeClr val="accent1"/>
+          </a:fillRef>
+          <a:effectRef idx="2">
+            <a:schemeClr val="accent1"/>
+          </a:effectRef>
+          <a:fontRef idx="minor">
+            <a:schemeClr val="lt1"/>
+          </a:fontRef>
+        </p:style>
+        <p:txBody>
+          <a:bodyPr rtlCol="0" anchor="ctr" wrap="none" lIns="64000" rIns="64000" tIns="25400" bIns="25400"/>
+          <a:lstStyle/>
+          <a:p>
+            <a:pPr algn="ctr"/>
+            <a:r>
+              <a:rPr sz="1300" b="0">
+                <a:solidFill>
+                  <a:srgbClr val="000000"/>
+                </a:solidFill>
+                <a:latin typeface="Calibri"/>
+              </a:rPr>
+              <a:t>Đạo đức sinh học</a:t>
+            </a:r>
+          </a:p>
+        </p:txBody>
+      </p:sp>
+      <p:cxnSp>
+        <p:nvCxnSpPr>
+          <p:cNvPr id="44" name="Connector 43"/>
+          <p:cNvCxnSpPr/>
+          <p:nvPr/>
+        </p:nvCxnSpPr>
+        <p:spPr>
+          <a:xfrm>
+            <a:off x="7715646" y="5238597"/>
+            <a:ext cx="1617037" cy="840557"/>
+          </a:xfrm>
+          <a:prstGeom prst="line">
+            <a:avLst/>
+          </a:prstGeom>
+          <a:ln w="15875">
+            <a:solidFill>
+              <a:srgbClr val="7030A0"/>
+            </a:solidFill>
+          </a:ln>
+        </p:spPr>
+        <p:style>
+          <a:lnRef idx="2">
+            <a:schemeClr val="accent1"/>
+          </a:lnRef>
+          <a:fillRef idx="0">
+            <a:schemeClr val="accent1"/>
+          </a:fillRef>
+          <a:effectRef idx="1">
+            <a:schemeClr val="accent1"/>
+          </a:effectRef>
+          <a:fontRef idx="minor">
+            <a:schemeClr val="tx1"/>
+          </a:fontRef>
+        </p:style>
+      </p:cxnSp>
+      <p:sp>
+        <p:nvSpPr>
+          <p:cNvPr id="45" name="Rounded Rectangle 44"/>
+          <p:cNvSpPr/>
+          <p:nvPr/>
+        </p:nvSpPr>
+        <p:spPr>
+          <a:xfrm>
+            <a:off x="9332683" y="5903554"/>
+            <a:ext cx="1831061" cy="351200"/>
+          </a:xfrm>
+          <a:prstGeom prst="roundRect">
+            <a:avLst>
+              <a:gd name="adj" fmla="val 50000"/>
+            </a:avLst>
+          </a:prstGeom>
+          <a:solidFill>
+            <a:srgbClr val="F3E8F7"/>
+          </a:solidFill>
+          <a:ln w="15875">
+            <a:solidFill>
+              <a:srgbClr val="7030A0"/>
+            </a:solidFill>
+          </a:ln>
+          <a:effectLst/>
+        </p:spPr>
+        <p:style>
+          <a:lnRef idx="1">
+            <a:schemeClr val="accent1"/>
+          </a:lnRef>
+          <a:fillRef idx="3">
+            <a:schemeClr val="accent1"/>
+          </a:fillRef>
+          <a:effectRef idx="2">
+            <a:schemeClr val="accent1"/>
+          </a:effectRef>
+          <a:fontRef idx="minor">
+            <a:schemeClr val="lt1"/>
+          </a:fontRef>
+        </p:style>
+        <p:txBody>
+          <a:bodyPr rtlCol="0" anchor="ctr" wrap="none" lIns="64000" rIns="64000" tIns="25400" bIns="25400"/>
+          <a:lstStyle/>
+          <a:p>
+            <a:pPr algn="ctr"/>
+            <a:r>
+              <a:rPr sz="1300" b="0">
+                <a:solidFill>
+                  <a:srgbClr val="000000"/>
+                </a:solidFill>
+                <a:latin typeface="Calibri"/>
+              </a:rPr>
+              <a:t>Giảm rác thải nhựa</a:t>
+            </a:r>
+          </a:p>
+        </p:txBody>
+      </p:sp>
+      <p:sp>
+        <p:nvSpPr>
+          <p:cNvPr id="46" name="Oval 45"/>
+          <p:cNvSpPr/>
+          <p:nvPr/>
+        </p:nvSpPr>
+        <p:spPr>
+          <a:xfrm>
+            <a:off x="6740679" y="4826713"/>
+            <a:ext cx="1949933" cy="823767"/>
+          </a:xfrm>
+          <a:prstGeom prst="ellipse">
+            <a:avLst/>
+          </a:prstGeom>
+          <a:solidFill>
+            <a:srgbClr val="FFF2CC"/>
+          </a:solidFill>
+          <a:ln w="31750">
+            <a:solidFill>
+              <a:srgbClr val="BF8F00"/>
+            </a:solidFill>
+          </a:ln>
+          <a:effectLst/>
+        </p:spPr>
+        <p:style>
+          <a:lnRef idx="1">
+            <a:schemeClr val="accent1"/>
+          </a:lnRef>
+          <a:fillRef idx="3">
+            <a:schemeClr val="accent1"/>
+          </a:fillRef>
+          <a:effectRef idx="2">
+            <a:schemeClr val="accent1"/>
+          </a:effectRef>
+          <a:fontRef idx="minor">
+            <a:schemeClr val="lt1"/>
+          </a:fontRef>
+        </p:style>
+        <p:txBody>
+          <a:bodyPr rtlCol="0" anchor="ctr" wrap="none" lIns="64000" rIns="64000" tIns="25400" bIns="25400"/>
+          <a:lstStyle/>
+          <a:p>
+            <a:pPr algn="ctr"/>
+            <a:r>
+              <a:rPr sz="1500" b="1">
+                <a:solidFill>
+                  <a:srgbClr val="000000"/>
+                </a:solidFill>
+                <a:latin typeface="Calibri"/>
+              </a:rPr>
+              <a:t>④ Phát triển</a:t>
+            </a:r>
+          </a:p>
+          <a:p>
+            <a:pPr algn="ctr"/>
+            <a:r>
+              <a:rPr sz="1500" b="1">
+                <a:solidFill>
+                  <a:srgbClr val="000000"/>
+                </a:solidFill>
+                <a:latin typeface="Calibri"/>
+              </a:rPr>
+              <a:t>bền vững</a:t>
+            </a:r>
+          </a:p>
+        </p:txBody>
+      </p:sp>
+      <p:sp>
+        <p:nvSpPr>
+          <p:cNvPr id="47" name="Oval 46"/>
+          <p:cNvSpPr/>
+          <p:nvPr/>
+        </p:nvSpPr>
+        <p:spPr>
+          <a:xfrm>
+            <a:off x="4705590" y="3287245"/>
+            <a:ext cx="2643353" cy="1335069"/>
+          </a:xfrm>
+          <a:prstGeom prst="ellipse">
+            <a:avLst/>
+          </a:prstGeom>
+          <a:solidFill>
+            <a:srgbClr val="002060"/>
+          </a:solidFill>
+          <a:ln w="25400">
+            <a:solidFill>
+              <a:srgbClr val="000B1E"/>
+            </a:solidFill>
+          </a:ln>
+          <a:effectLst/>
+        </p:spPr>
+        <p:style>
+          <a:lnRef idx="1">
+            <a:schemeClr val="accent1"/>
+          </a:lnRef>
+          <a:fillRef idx="3">
+            <a:schemeClr val="accent1"/>
+          </a:fillRef>
+          <a:effectRef idx="2">
+            <a:schemeClr val="accent1"/>
+          </a:effectRef>
+          <a:fontRef idx="minor">
+            <a:schemeClr val="lt1"/>
+          </a:fontRef>
+        </p:style>
+        <p:txBody>
+          <a:bodyPr rtlCol="0" anchor="ctr" wrap="none" lIns="64000" rIns="64000" tIns="25400" bIns="25400"/>
+          <a:lstStyle/>
+          <a:p>
+            <a:pPr algn="ctr"/>
+            <a:r>
+              <a:rPr sz="1700" b="1">
+                <a:solidFill>
+                  <a:srgbClr val="FFFFFF"/>
+                </a:solidFill>
+                <a:latin typeface="Calibri"/>
+              </a:rPr>
+              <a:t>GIỚI THIỆU KHÁI</a:t>
+            </a:r>
+          </a:p>
+          <a:p>
+            <a:pPr algn="ctr"/>
+            <a:r>
+              <a:rPr sz="1700" b="1">
+                <a:solidFill>
+                  <a:srgbClr val="FFFFFF"/>
+                </a:solidFill>
+                <a:latin typeface="Calibri"/>
+              </a:rPr>
+              <a:t>QUÁT MÔN SINH</a:t>
+            </a:r>
+          </a:p>
+          <a:p>
+            <a:pPr algn="ctr"/>
+            <a:r>
+              <a:rPr sz="1700" b="1">
+                <a:solidFill>
+                  <a:srgbClr val="FFFFFF"/>
+                </a:solidFill>
+                <a:latin typeface="Calibri"/>
+              </a:rPr>
+              <a:t>HỌC</a:t>
+            </a:r>
+          </a:p>
+        </p:txBody>
+      </p:sp>
     </p:spTree>
   </p:cSld>
   <p:clrMapOvr>
